--- a/scripts/PowerPoint Slide Inventory Script/refined_v3/iteration_2/deck.pptx
+++ b/scripts/PowerPoint Slide Inventory Script/refined_v3/iteration_2/deck.pptx
@@ -15684,19 +15684,19 @@
           <a:lstStyle/>
           <a:p>
             <a:r>
-              <a:t>Six specialisms across the DDaT lifecycle</a:t>
-            </a:r>
-          </a:p>
-        </p:txBody>
-      </p:sp>
-      <p:sp>
-        <p:nvSpPr>
-          <p:cNvPr id="3" name="Content Placeholder 2"/>
-          <p:cNvSpPr>
-            <a:spLocks noGrp="1"/>
-          </p:cNvSpPr>
-          <p:nvPr>
-            <p:ph idx="17" sz="quarter"/>
+              <a:t>Six areas of specialism across the DDaT lifecycle</a:t>
+            </a:r>
+          </a:p>
+        </p:txBody>
+      </p:sp>
+      <p:sp>
+        <p:nvSpPr>
+          <p:cNvPr id="3" name="Text Placeholder 2"/>
+          <p:cNvSpPr>
+            <a:spLocks noGrp="1"/>
+          </p:cNvSpPr>
+          <p:nvPr>
+            <p:ph type="body" idx="12" sz="quarter"/>
           </p:nvPr>
         </p:nvSpPr>
         <p:spPr/>
@@ -15708,127 +15708,83 @@
               <a:spcBef>
                 <a:spcPts val="400"/>
               </a:spcBef>
+              <a:buChar char="•"/>
             </a:pPr>
             <a:r>
               <a:rPr>
                 <a:latin typeface="Arial"/>
               </a:rPr>
-              <a:t>Digital Service Design</a:t>
-            </a:r>
-            <a:br/>
-            <a:r>
-              <a:rPr>
-                <a:latin typeface="Arial"/>
-              </a:rPr>
-              <a:t>User-centred, inclusive, outcome-driven</a:t>
-            </a:r>
-          </a:p>
-        </p:txBody>
-      </p:sp>
-      <p:sp>
-        <p:nvSpPr>
-          <p:cNvPr id="4" name="Content Placeholder 3"/>
-          <p:cNvSpPr>
-            <a:spLocks noGrp="1"/>
-          </p:cNvSpPr>
-          <p:nvPr>
-            <p:ph idx="18" sz="quarter"/>
-          </p:nvPr>
-        </p:nvSpPr>
-        <p:spPr/>
-        <p:txBody>
-          <a:bodyPr/>
-          <a:lstStyle/>
+              <a:t>Digital Service Design: user-centred, inclusive, outcome-driven</a:t>
+            </a:r>
+          </a:p>
           <a:p>
             <a:pPr>
               <a:spcBef>
                 <a:spcPts val="400"/>
               </a:spcBef>
+              <a:buChar char="•"/>
             </a:pPr>
             <a:r>
               <a:rPr>
                 <a:latin typeface="Arial"/>
               </a:rPr>
-              <a:t>Data, Analytics &amp; AI</a:t>
-            </a:r>
-            <a:br/>
-            <a:r>
-              <a:rPr>
-                <a:latin typeface="Arial"/>
-              </a:rPr>
-              <a:t>Governed platforms, predictive insights</a:t>
-            </a:r>
-          </a:p>
-        </p:txBody>
-      </p:sp>
-      <p:sp>
-        <p:nvSpPr>
-          <p:cNvPr id="5" name="Content Placeholder 4"/>
-          <p:cNvSpPr>
-            <a:spLocks noGrp="1"/>
-          </p:cNvSpPr>
-          <p:nvPr>
-            <p:ph idx="20" sz="quarter"/>
-          </p:nvPr>
-        </p:nvSpPr>
-        <p:spPr/>
-        <p:txBody>
-          <a:bodyPr/>
-          <a:lstStyle/>
+              <a:t>Data, Analytics &amp; AI: governed platforms, predictive insights</a:t>
+            </a:r>
+          </a:p>
           <a:p>
             <a:pPr>
               <a:spcBef>
                 <a:spcPts val="400"/>
               </a:spcBef>
+              <a:buChar char="•"/>
             </a:pPr>
             <a:r>
               <a:rPr>
                 <a:latin typeface="Arial"/>
               </a:rPr>
-              <a:t>Platforms &amp; Integration</a:t>
-            </a:r>
-            <a:br/>
-            <a:r>
-              <a:rPr>
-                <a:latin typeface="Arial"/>
-              </a:rPr>
-              <a:t>Modular, API-led architectures</a:t>
-            </a:r>
-          </a:p>
-        </p:txBody>
-      </p:sp>
-      <p:sp>
-        <p:nvSpPr>
-          <p:cNvPr id="6" name="Content Placeholder 5"/>
-          <p:cNvSpPr>
-            <a:spLocks noGrp="1"/>
-          </p:cNvSpPr>
-          <p:nvPr>
-            <p:ph idx="19" sz="quarter"/>
-          </p:nvPr>
-        </p:nvSpPr>
-        <p:spPr/>
-        <p:txBody>
-          <a:bodyPr/>
-          <a:lstStyle/>
+              <a:t>Platforms &amp; Integration: modular, API-led architectures</a:t>
+            </a:r>
+          </a:p>
           <a:p>
             <a:pPr>
               <a:spcBef>
                 <a:spcPts val="400"/>
               </a:spcBef>
+              <a:buChar char="•"/>
             </a:pPr>
             <a:r>
               <a:rPr>
                 <a:latin typeface="Arial"/>
               </a:rPr>
-              <a:t>Cloud &amp; DevOps</a:t>
-            </a:r>
-            <a:br/>
+              <a:t>Cloud &amp; DevOps: secure hybrid, FinOps, resilient delivery</a:t>
+            </a:r>
+          </a:p>
+          <a:p>
+            <a:pPr>
+              <a:spcBef>
+                <a:spcPts val="400"/>
+              </a:spcBef>
+              <a:buChar char="•"/>
+            </a:pPr>
             <a:r>
               <a:rPr>
                 <a:latin typeface="Arial"/>
               </a:rPr>
-              <a:t>Secure hybrid, FinOps, resilience</a:t>
+              <a:t>Technical Consultancy: advisory, coaching, embedded delivery</a:t>
+            </a:r>
+          </a:p>
+          <a:p>
+            <a:pPr>
+              <a:spcBef>
+                <a:spcPts val="400"/>
+              </a:spcBef>
+              <a:buChar char="•"/>
+            </a:pPr>
+            <a:r>
+              <a:rPr>
+                <a:latin typeface="Arial"/>
+              </a:rPr>
+              <a:t>Agile Delivery: product-led, measurable value, scale-ready</a:t>
             </a:r>
           </a:p>
         </p:txBody>
@@ -16022,7 +15978,7 @@
           <a:lstStyle/>
           <a:p>
             <a:r>
-              <a:t>Proven outcomes delivering DDaT at pace</a:t>
+              <a:t>Proven outcomes delivering DDaT in the public sector</a:t>
             </a:r>
           </a:p>
         </p:txBody>
@@ -16052,7 +16008,7 @@
               <a:rPr>
                 <a:latin typeface="Arial"/>
               </a:rPr>
-              <a:t>IBM and Stable delivered successful programmes for UK public sector clients.</a:t>
+              <a:t>IBM and Stable delivered DDaT programmes for UK public sector clients.</a:t>
             </a:r>
           </a:p>
           <a:p>
@@ -16524,19 +16480,19 @@
           <a:lstStyle/>
           <a:p>
             <a:r>
-              <a:t>Foundational architecture for NRW on the Microsoft ecosystem</a:t>
-            </a:r>
-          </a:p>
-        </p:txBody>
-      </p:sp>
-      <p:sp>
-        <p:nvSpPr>
-          <p:cNvPr id="3" name="Text Placeholder 2"/>
-          <p:cNvSpPr>
-            <a:spLocks noGrp="1"/>
-          </p:cNvSpPr>
-          <p:nvPr>
-            <p:ph type="body" idx="13" sz="quarter"/>
+              <a:t>Foundational architecture for a Microsoft ecosystem</a:t>
+            </a:r>
+          </a:p>
+        </p:txBody>
+      </p:sp>
+      <p:sp>
+        <p:nvSpPr>
+          <p:cNvPr id="3" name="Content Placeholder 2"/>
+          <p:cNvSpPr>
+            <a:spLocks noGrp="1"/>
+          </p:cNvSpPr>
+          <p:nvPr>
+            <p:ph idx="17" sz="quarter"/>
           </p:nvPr>
         </p:nvSpPr>
         <p:spPr/>
@@ -16548,73 +16504,129 @@
               <a:spcBef>
                 <a:spcPts val="400"/>
               </a:spcBef>
-              <a:buChar char="•"/>
             </a:pPr>
             <a:r>
               <a:rPr>
                 <a:latin typeface="Arial"/>
               </a:rPr>
-              <a:t>Layer 1: Engagement</a:t>
-            </a:r>
-          </a:p>
+              <a:t>Engagement</a:t>
+            </a:r>
+            <a:br/>
+            <a:r>
+              <a:rPr>
+                <a:latin typeface="Arial"/>
+              </a:rPr>
+              <a:t>Customer touchpoints and experience channels</a:t>
+            </a:r>
+          </a:p>
+        </p:txBody>
+      </p:sp>
+      <p:sp>
+        <p:nvSpPr>
+          <p:cNvPr id="4" name="Content Placeholder 3"/>
+          <p:cNvSpPr>
+            <a:spLocks noGrp="1"/>
+          </p:cNvSpPr>
+          <p:nvPr>
+            <p:ph idx="18" sz="quarter"/>
+          </p:nvPr>
+        </p:nvSpPr>
+        <p:spPr/>
+        <p:txBody>
+          <a:bodyPr/>
+          <a:lstStyle/>
           <a:p>
             <a:pPr>
               <a:spcBef>
                 <a:spcPts val="400"/>
               </a:spcBef>
-              <a:buChar char="•"/>
             </a:pPr>
             <a:r>
               <a:rPr>
                 <a:latin typeface="Arial"/>
               </a:rPr>
-              <a:t>Layer 2: CRM (Dynamics 365 as authoritative domain)</a:t>
-            </a:r>
-          </a:p>
+              <a:t>CRM</a:t>
+            </a:r>
+            <a:br/>
+            <a:r>
+              <a:rPr>
+                <a:latin typeface="Arial"/>
+              </a:rPr>
+              <a:t>Dynamics 365 as the authoritative customer domain</a:t>
+            </a:r>
+          </a:p>
+        </p:txBody>
+      </p:sp>
+      <p:sp>
+        <p:nvSpPr>
+          <p:cNvPr id="5" name="Content Placeholder 4"/>
+          <p:cNvSpPr>
+            <a:spLocks noGrp="1"/>
+          </p:cNvSpPr>
+          <p:nvPr>
+            <p:ph idx="20" sz="quarter"/>
+          </p:nvPr>
+        </p:nvSpPr>
+        <p:spPr/>
+        <p:txBody>
+          <a:bodyPr/>
+          <a:lstStyle/>
           <a:p>
             <a:pPr>
               <a:spcBef>
                 <a:spcPts val="400"/>
               </a:spcBef>
-              <a:buChar char="•"/>
             </a:pPr>
             <a:r>
               <a:rPr>
                 <a:latin typeface="Arial"/>
               </a:rPr>
-              <a:t>Layer 3: Integration (Azure orchestration, API-first)</a:t>
-            </a:r>
-          </a:p>
+              <a:t>Integration</a:t>
+            </a:r>
+            <a:br/>
+            <a:r>
+              <a:rPr>
+                <a:latin typeface="Arial"/>
+              </a:rPr>
+              <a:t>Azure integration services for orchestration</a:t>
+            </a:r>
+          </a:p>
+        </p:txBody>
+      </p:sp>
+      <p:sp>
+        <p:nvSpPr>
+          <p:cNvPr id="6" name="Content Placeholder 5"/>
+          <p:cNvSpPr>
+            <a:spLocks noGrp="1"/>
+          </p:cNvSpPr>
+          <p:nvPr>
+            <p:ph idx="19" sz="quarter"/>
+          </p:nvPr>
+        </p:nvSpPr>
+        <p:spPr/>
+        <p:txBody>
+          <a:bodyPr/>
+          <a:lstStyle/>
           <a:p>
             <a:pPr>
               <a:spcBef>
                 <a:spcPts val="400"/>
               </a:spcBef>
-              <a:buChar char="•"/>
             </a:pPr>
             <a:r>
               <a:rPr>
                 <a:latin typeface="Arial"/>
               </a:rPr>
-              <a:t>Layer 4: Data (analytics and insights)</a:t>
-            </a:r>
-          </a:p>
-        </p:txBody>
-      </p:sp>
-      <p:sp>
-        <p:nvSpPr>
-          <p:cNvPr id="4" name="Picture Placeholder 3"/>
-          <p:cNvSpPr>
-            <a:spLocks noGrp="1"/>
-          </p:cNvSpPr>
-          <p:nvPr>
-            <p:ph type="pic" idx="14" sz="quarter"/>
-          </p:nvPr>
-        </p:nvSpPr>
-        <p:spPr/>
-        <p:txBody>
-          <a:bodyPr/>
-          <a:p/>
+              <a:t>Data</a:t>
+            </a:r>
+            <a:br/>
+            <a:r>
+              <a:rPr>
+                <a:latin typeface="Arial"/>
+              </a:rPr>
+              <a:t>CMS/SharePoint for content, plus analytics insights</a:t>
+            </a:r>
+          </a:p>
         </p:txBody>
       </p:sp>
     </p:spTree>
@@ -17005,7 +17017,7 @@
               <a:rPr>
                 <a:latin typeface="Arial"/>
               </a:rPr>
-              <a:t>Introduce shared customer identifier model</a:t>
+              <a:t>Create shared customer identifier model</a:t>
             </a:r>
           </a:p>
           <a:p>
@@ -17019,7 +17031,7 @@
               <a:rPr>
                 <a:latin typeface="Arial"/>
               </a:rPr>
-              <a:t>Dynamics 365 as master customer record</a:t>
+              <a:t>Use Dynamics 365 as master customer record</a:t>
             </a:r>
           </a:p>
           <a:p>
@@ -17033,7 +17045,7 @@
               <a:rPr>
                 <a:latin typeface="Arial"/>
               </a:rPr>
-              <a:t>API-based integration for real-time data</a:t>
+              <a:t>Enable API-based integration for real-time data</a:t>
             </a:r>
           </a:p>
         </p:txBody>
@@ -17063,7 +17075,7 @@
               <a:rPr>
                 <a:latin typeface="Arial"/>
               </a:rPr>
-              <a:t>Controlled consolidation via MDM and survivorship rules</a:t>
+              <a:t>Consolidate with MDM and survivorship rules</a:t>
             </a:r>
           </a:p>
           <a:p>
@@ -17077,7 +17089,7 @@
               <a:rPr>
                 <a:latin typeface="Arial"/>
               </a:rPr>
-              <a:t>Azure-native data platform for analytics</a:t>
+              <a:t>Run analytics on an Azure-native data platform</a:t>
             </a:r>
           </a:p>
           <a:p>
@@ -17105,7 +17117,7 @@
               <a:rPr>
                 <a:latin typeface="Arial"/>
               </a:rPr>
-              <a:t>Sequenced delivery to manage risk</a:t>
+              <a:t>Sequence delivery to manage risk</a:t>
             </a:r>
           </a:p>
         </p:txBody>
@@ -17174,7 +17186,7 @@
               <a:rPr>
                 <a:latin typeface="Arial"/>
               </a:rPr>
-              <a:t>1. Our Joint Proposition</a:t>
+              <a:t>1. Joint Proposition</a:t>
             </a:r>
           </a:p>
           <a:p>
@@ -17297,7 +17309,7 @@
           <a:lstStyle/>
           <a:p>
             <a:r>
-              <a:t>Key risks and mitigations for data integration</a:t>
+              <a:t>Data integration: key risks and mitigations</a:t>
             </a:r>
           </a:p>
         </p:txBody>
@@ -17341,7 +17353,7 @@
               <a:rPr>
                 <a:latin typeface="Arial"/>
               </a:rPr>
-              <a:t>Hidden dependencies in legacy systems</a:t>
+              <a:t>Legacy dependencies create hidden integration risk</a:t>
             </a:r>
           </a:p>
           <a:p>
@@ -17355,7 +17367,7 @@
               <a:rPr>
                 <a:latin typeface="Arial"/>
               </a:rPr>
-              <a:t>Integration performance and security constraints</a:t>
+              <a:t>Performance and security constraints limit throughput</a:t>
             </a:r>
           </a:p>
           <a:p>
@@ -17369,7 +17381,7 @@
               <a:rPr>
                 <a:latin typeface="Arial"/>
               </a:rPr>
-              <a:t>Inconsistent ownership of customer data</a:t>
+              <a:t>Unclear ownership slows governance and decisions</a:t>
             </a:r>
           </a:p>
         </p:txBody>
@@ -17399,7 +17411,7 @@
               <a:rPr>
                 <a:latin typeface="Arial"/>
               </a:rPr>
-              <a:t>Structured data profiling and validation</a:t>
+              <a:t>Structured profiling, validation, and data quality rules</a:t>
             </a:r>
           </a:p>
           <a:p>
@@ -17413,7 +17425,7 @@
               <a:rPr>
                 <a:latin typeface="Arial"/>
               </a:rPr>
-              <a:t>Integration layer wraps existing systems</a:t>
+              <a:t>Integration layer wraps legacy systems safely</a:t>
             </a:r>
           </a:p>
           <a:p>
@@ -17427,7 +17439,7 @@
               <a:rPr>
                 <a:latin typeface="Arial"/>
               </a:rPr>
-              <a:t>API-driven connectivity with strong governance</a:t>
+              <a:t>API connectivity with strong governance controls</a:t>
             </a:r>
           </a:p>
           <a:p>
@@ -17664,7 +17676,7 @@
               <a:rPr>
                 <a:latin typeface="Arial"/>
               </a:rPr>
-              <a:t>Alpha: pilot teams, validate assumptions</a:t>
+              <a:t>Pilot: validate assumptions with alpha teams</a:t>
             </a:r>
           </a:p>
         </p:txBody>
@@ -17693,7 +17705,7 @@
               <a:rPr>
                 <a:latin typeface="Arial"/>
               </a:rPr>
-              <a:t>Beta: expand, frequent iterations</a:t>
+              <a:t>Expand: iterate frequently with beta teams</a:t>
             </a:r>
           </a:p>
         </p:txBody>
@@ -17722,7 +17734,7 @@
               <a:rPr>
                 <a:latin typeface="Arial"/>
               </a:rPr>
-              <a:t>Live: sustainable mix, maintenance and operations</a:t>
+              <a:t>Live: sustain operations with a stable mix</a:t>
             </a:r>
           </a:p>
         </p:txBody>
@@ -17751,7 +17763,7 @@
               <a:rPr>
                 <a:latin typeface="Arial"/>
               </a:rPr>
-              <a:t>Retire: decommissioning with user engagement</a:t>
+              <a:t>Retire: decommission with user engagement</a:t>
             </a:r>
           </a:p>
         </p:txBody>
@@ -18572,7 +18584,7 @@
           <a:lstStyle/>
           <a:p>
             <a:r>
-              <a:t>Innovation window outputs (what we delivered)</a:t>
+              <a:t>Innovation window outputs and deliverables</a:t>
             </a:r>
           </a:p>
         </p:txBody>
@@ -18616,7 +18628,7 @@
               <a:rPr>
                 <a:latin typeface="Arial"/>
               </a:rPr>
-              <a:t>Navigation and information architecture prototypes</a:t>
+              <a:t>Prototypes for priority journeys and navigation</a:t>
             </a:r>
           </a:p>
           <a:p>
@@ -18630,35 +18642,7 @@
               <a:rPr>
                 <a:latin typeface="Arial"/>
               </a:rPr>
-              <a:t>Evidence-led search improvements</a:t>
-            </a:r>
-          </a:p>
-          <a:p>
-            <a:pPr>
-              <a:spcBef>
-                <a:spcPts val="400"/>
-              </a:spcBef>
-              <a:buChar char="•"/>
-            </a:pPr>
-            <a:r>
-              <a:rPr>
-                <a:latin typeface="Arial"/>
-              </a:rPr>
-              <a:t>End-to-end prototypes for priority journeys</a:t>
-            </a:r>
-          </a:p>
-          <a:p>
-            <a:pPr>
-              <a:spcBef>
-                <a:spcPts val="400"/>
-              </a:spcBef>
-              <a:buChar char="•"/>
-            </a:pPr>
-            <a:r>
-              <a:rPr>
-                <a:latin typeface="Arial"/>
-              </a:rPr>
-              <a:t>Accessibility and content improvement backlog</a:t>
+              <a:t>Evidence-led search improvements and content backlog</a:t>
             </a:r>
           </a:p>
           <a:p>
@@ -18725,7 +18709,7 @@
           <a:lstStyle/>
           <a:p>
             <a:r>
-              <a:t>Section 1: Our Joint Proposition</a:t>
+              <a:t>Our Joint Proposition</a:t>
             </a:r>
           </a:p>
         </p:txBody>
@@ -18975,7 +18959,7 @@
           <a:lstStyle/>
           <a:p>
             <a:r>
-              <a:t>Section 5: Sustainability &amp; Social Value</a:t>
+              <a:t>Sustainability &amp; Social Value</a:t>
             </a:r>
           </a:p>
         </p:txBody>
@@ -19352,7 +19336,7 @@
           <a:lstStyle/>
           <a:p>
             <a:r>
-              <a:t>Monitoring sustainability and social value performance</a:t>
+              <a:t>Monitor sustainability and social value performance</a:t>
             </a:r>
           </a:p>
         </p:txBody>
@@ -19382,7 +19366,7 @@
               <a:rPr>
                 <a:latin typeface="Arial"/>
               </a:rPr>
-              <a:t>KPIs: carbon impact, supplier participation, skills uplift</a:t>
+              <a:t>Track KPIs for carbon impact, supplier participation, and skills uplift.</a:t>
             </a:r>
           </a:p>
           <a:p>
@@ -19396,7 +19380,7 @@
               <a:rPr>
                 <a:latin typeface="Arial"/>
               </a:rPr>
-              <a:t>Structured reporting aligned to framework governance</a:t>
+              <a:t>Report through framework governance with transparent, continuous improvement.</a:t>
             </a:r>
           </a:p>
           <a:p>
@@ -19410,21 +19394,7 @@
               <a:rPr>
                 <a:latin typeface="Arial"/>
               </a:rPr>
-              <a:t>Commitments scaled to engagement size</a:t>
-            </a:r>
-          </a:p>
-          <a:p>
-            <a:pPr>
-              <a:spcBef>
-                <a:spcPts val="400"/>
-              </a:spcBef>
-              <a:buChar char="•"/>
-            </a:pPr>
-            <a:r>
-              <a:rPr>
-                <a:latin typeface="Arial"/>
-              </a:rPr>
-              <a:t>Continuous improvement with transparent outcomes</a:t>
+              <a:t>Scale commitments proportionately to engagement size for lasting impact.</a:t>
             </a:r>
           </a:p>
         </p:txBody>
@@ -20007,7 +19977,7 @@
           <a:lstStyle/>
           <a:p>
             <a:r>
-              <a:t>Section 7: Close &amp; Next Steps</a:t>
+              <a:t>Close &amp; Next Steps</a:t>
             </a:r>
           </a:p>
         </p:txBody>
@@ -20046,7 +20016,7 @@
           <a:lstStyle/>
           <a:p>
             <a:r>
-              <a:t>IBM and Stable deliver scale, local expertise, and sustainable capability</a:t>
+              <a:t>IBM and Stable: scale with local expertise</a:t>
             </a:r>
           </a:p>
         </p:txBody>
@@ -20085,7 +20055,7 @@
           <a:lstStyle/>
           <a:p>
             <a:r>
-              <a:t>Next steps: mobilise NRW and supplier discovery</a:t>
+              <a:t>NRW &amp; supplier mobilisation: next steps</a:t>
             </a:r>
           </a:p>
         </p:txBody>
@@ -20143,7 +20113,7 @@
               <a:rPr>
                 <a:latin typeface="Arial"/>
               </a:rPr>
-              <a:t>Stable: confirm Welsh-based delivery team availability</a:t>
+              <a:t>Stable: confirm Welsh delivery team availability</a:t>
             </a:r>
           </a:p>
           <a:p>
@@ -20201,7 +20171,7 @@
               <a:rPr>
                 <a:latin typeface="Arial"/>
               </a:rPr>
-              <a:t>NRW: share system inventory and data dictionary</a:t>
+              <a:t>NRW: share system inventory &amp; data dictionary</a:t>
             </a:r>
           </a:p>
           <a:p>
@@ -20229,7 +20199,7 @@
               <a:rPr>
                 <a:latin typeface="Arial"/>
               </a:rPr>
-              <a:t>NRW: review sustainability and social value KPIs</a:t>
+              <a:t>NRW: review sustainability &amp; social value KPIs</a:t>
             </a:r>
           </a:p>
         </p:txBody>
@@ -20297,7 +20267,7 @@
               <a:rPr>
                 <a:latin typeface="Arial"/>
               </a:rPr>
-              <a:t>['Dave Aspden | Stable CEO | dave@stable.co.uk', 'Phil Davenport | IBM Client Delivery Partner | philip.davenport@ibm.com', 'David Rowley | IBM Microsoft Practice CTO | david.rowley@ibm.com', 'Ryan Lewis | Stable CTO/MD | ryan@stable.co.uk']</a:t>
+              <a:t>Dave Aspden (Stable CEO) dave@stable.co.uk | Phil Davenport (IBM Client Delivery Partner) philip.davenport@ibm.com | David Rowley (IBM Microsoft Practice CTO) david.rowley@ibm.com | Ryan Lewis (Stable CTO/MD) ryan@stable.co.uk</a:t>
             </a:r>
           </a:p>
         </p:txBody>
